--- a/documents/proposal/presentation.pptx
+++ b/documents/proposal/presentation.pptx
@@ -12,26 +12,27 @@
     <p:sldId id="260" r:id="rId7"/>
     <p:sldId id="263" r:id="rId8"/>
     <p:sldId id="261" r:id="rId9"/>
-    <p:sldId id="264" r:id="rId10"/>
-    <p:sldId id="266" r:id="rId11"/>
+    <p:sldId id="268" r:id="rId10"/>
+    <p:sldId id="264" r:id="rId11"/>
+    <p:sldId id="266" r:id="rId12"/>
   </p:sldIdLst>
   <p:sldSz cx="18288000" cy="10287000"/>
   <p:notesSz cx="6858000" cy="9144000"/>
   <p:embeddedFontLst>
     <p:embeddedFont>
       <p:font typeface="Inter Bold" panose="02000503000000020004"/>
-      <p:bold r:id="rId15"/>
+      <p:bold r:id="rId16"/>
     </p:embeddedFont>
     <p:embeddedFont>
       <p:font typeface="Inter" panose="02000503000000020004"/>
-      <p:regular r:id="rId16"/>
+      <p:regular r:id="rId17"/>
     </p:embeddedFont>
     <p:embeddedFont>
       <p:font typeface="Calibri" panose="020F0502020204030204" charset="0"/>
-      <p:regular r:id="rId17"/>
-      <p:bold r:id="rId18"/>
-      <p:italic r:id="rId19"/>
-      <p:boldItalic r:id="rId20"/>
+      <p:regular r:id="rId18"/>
+      <p:bold r:id="rId19"/>
+      <p:italic r:id="rId20"/>
+      <p:boldItalic r:id="rId21"/>
     </p:embeddedFont>
   </p:embeddedFontLst>
   <p:defaultTextStyle>
@@ -3460,6 +3461,81 @@
 </p:sld>
 </file>
 
+<file path=ppt/slides/slide10.xml><?xml version="1.0" encoding="utf-8"?>
+<p:sld xmlns:a="http://schemas.openxmlformats.org/drawingml/2006/main" xmlns:r="http://schemas.openxmlformats.org/officeDocument/2006/relationships" xmlns:p="http://schemas.openxmlformats.org/presentationml/2006/main">
+  <p:cSld>
+    <p:bg>
+      <p:bgPr>
+        <a:solidFill>
+          <a:srgbClr val="F4EDE2"/>
+        </a:solidFill>
+        <a:effectLst/>
+      </p:bgPr>
+    </p:bg>
+    <p:spTree>
+      <p:nvGrpSpPr>
+        <p:cNvPr id="1" name=""/>
+        <p:cNvGrpSpPr/>
+        <p:nvPr/>
+      </p:nvGrpSpPr>
+      <p:grpSpPr>
+        <a:xfrm>
+          <a:off x="0" y="0"/>
+          <a:ext cx="0" cy="0"/>
+          <a:chOff x="0" y="0"/>
+          <a:chExt cx="0" cy="0"/>
+        </a:xfrm>
+      </p:grpSpPr>
+      <p:sp>
+        <p:nvSpPr>
+          <p:cNvPr id="2" name="Title"/>
+          <p:cNvSpPr txBox="1"/>
+          <p:nvPr/>
+        </p:nvSpPr>
+        <p:spPr>
+          <a:xfrm>
+            <a:off x="7620000" y="4543425"/>
+            <a:ext cx="3032125" cy="1200150"/>
+          </a:xfrm>
+          <a:prstGeom prst="rect">
+            <a:avLst/>
+          </a:prstGeom>
+        </p:spPr>
+        <p:txBody>
+          <a:bodyPr lIns="0" tIns="0" rIns="0" bIns="0" rtlCol="0" anchor="ctr"/>
+          <a:lstStyle/>
+          <a:p>
+            <a:pPr algn="l">
+              <a:lnSpc>
+                <a:spcPts val="4790"/>
+              </a:lnSpc>
+            </a:pPr>
+            <a:r>
+              <a:rPr lang="en-US" altLang="id-ID" sz="4200" b="1">
+                <a:solidFill>
+                  <a:srgbClr val="000000"/>
+                </a:solidFill>
+                <a:latin typeface="Inter Bold" panose="02000503000000020004"/>
+              </a:rPr>
+              <a:t>Thank You</a:t>
+            </a:r>
+            <a:endParaRPr lang="en-US" altLang="id-ID" sz="2400">
+              <a:solidFill>
+                <a:srgbClr val="303870"/>
+              </a:solidFill>
+              <a:latin typeface="Inter" panose="02000503000000020004"/>
+            </a:endParaRPr>
+          </a:p>
+        </p:txBody>
+      </p:sp>
+    </p:spTree>
+  </p:cSld>
+  <p:clrMapOvr>
+    <a:masterClrMapping/>
+  </p:clrMapOvr>
+</p:sld>
+</file>
+
 <file path=ppt/slides/slide2.xml><?xml version="1.0" encoding="utf-8"?>
 <p:sld xmlns:a="http://schemas.openxmlformats.org/drawingml/2006/main" xmlns:r="http://schemas.openxmlformats.org/officeDocument/2006/relationships" xmlns:p="http://schemas.openxmlformats.org/presentationml/2006/main">
   <p:cSld>
@@ -6985,64 +7061,42 @@
         </p:nvSpPr>
         <p:spPr>
           <a:xfrm>
-            <a:off x="457200" y="420000"/>
-            <a:ext cx="17373600" cy="700000"/>
+            <a:off x="457200" y="1200000"/>
+            <a:ext cx="17373600" cy="1200000"/>
           </a:xfrm>
           <a:prstGeom prst="rect">
             <a:avLst/>
           </a:prstGeom>
         </p:spPr>
         <p:txBody>
-          <a:bodyPr wrap="square" lIns="0" tIns="0" rIns="0" bIns="0" rtlCol="0" anchor="t"/>
+          <a:bodyPr lIns="0" tIns="0" rIns="0" bIns="0" rtlCol="0" anchor="ctr"/>
           <a:lstStyle/>
           <a:p>
             <a:pPr algn="l">
               <a:lnSpc>
-                <a:spcPts val="4500"/>
-              </a:lnSpc>
-            </a:pPr>
-            <a:r>
-              <a:rPr lang="id-ID" sz="4000" b="1">
+                <a:spcPts val="4790"/>
+              </a:lnSpc>
+            </a:pPr>
+            <a:r>
+              <a:rPr lang="en-US" altLang="id-ID" sz="4200" b="1">
                 <a:solidFill>
                   <a:srgbClr val="000000"/>
                 </a:solidFill>
-                <a:latin typeface="Inter Bold" panose="02000503000000020004"/>
-              </a:rPr>
-              <a:t>Timeline</a:t>
-            </a:r>
-            <a:endParaRPr lang="id-ID" sz="4000" b="1">
-              <a:solidFill>
-                <a:srgbClr val="000000"/>
-              </a:solidFill>
-              <a:latin typeface="Inter Bold" panose="02000503000000020004"/>
-            </a:endParaRPr>
-          </a:p>
-        </p:txBody>
-      </p:sp>
-      <p:pic>
-        <p:nvPicPr>
-          <p:cNvPr id="4" name="Picture 3" descr="Generated image 1"/>
-          <p:cNvPicPr>
-            <a:picLocks noChangeAspect="1"/>
-          </p:cNvPicPr>
-          <p:nvPr/>
-        </p:nvPicPr>
-        <p:blipFill>
-          <a:blip r:embed="rId1"/>
-          <a:stretch>
-            <a:fillRect/>
-          </a:stretch>
-        </p:blipFill>
-        <p:spPr>
-          <a:xfrm>
-            <a:off x="1981200" y="1638300"/>
-            <a:ext cx="13651230" cy="7503160"/>
-          </a:xfrm>
-          <a:prstGeom prst="rect">
-            <a:avLst/>
-          </a:prstGeom>
-        </p:spPr>
-      </p:pic>
+                <a:latin typeface="+mj-lt"/>
+                <a:cs typeface="+mj-lt"/>
+              </a:rPr>
+              <a:t>In progressing</a:t>
+            </a:r>
+            <a:endParaRPr lang="en-US" altLang="id-ID" sz="2400">
+              <a:solidFill>
+                <a:srgbClr val="303870"/>
+              </a:solidFill>
+              <a:latin typeface="+mj-lt"/>
+              <a:cs typeface="+mj-lt"/>
+            </a:endParaRPr>
+          </a:p>
+        </p:txBody>
+      </p:sp>
     </p:spTree>
   </p:cSld>
   <p:clrMapOvr>
@@ -7084,40 +7138,64 @@
         </p:nvSpPr>
         <p:spPr>
           <a:xfrm>
-            <a:off x="7620000" y="4543425"/>
-            <a:ext cx="3032125" cy="1200150"/>
+            <a:off x="457200" y="420000"/>
+            <a:ext cx="17373600" cy="700000"/>
           </a:xfrm>
           <a:prstGeom prst="rect">
             <a:avLst/>
           </a:prstGeom>
         </p:spPr>
         <p:txBody>
-          <a:bodyPr lIns="0" tIns="0" rIns="0" bIns="0" rtlCol="0" anchor="ctr"/>
+          <a:bodyPr wrap="square" lIns="0" tIns="0" rIns="0" bIns="0" rtlCol="0" anchor="t"/>
           <a:lstStyle/>
           <a:p>
             <a:pPr algn="l">
               <a:lnSpc>
-                <a:spcPts val="4790"/>
-              </a:lnSpc>
-            </a:pPr>
-            <a:r>
-              <a:rPr lang="en-US" altLang="id-ID" sz="4200" b="1">
+                <a:spcPts val="4500"/>
+              </a:lnSpc>
+            </a:pPr>
+            <a:r>
+              <a:rPr lang="id-ID" sz="4000" b="1">
                 <a:solidFill>
                   <a:srgbClr val="000000"/>
                 </a:solidFill>
                 <a:latin typeface="Inter Bold" panose="02000503000000020004"/>
               </a:rPr>
-              <a:t>Thank You</a:t>
-            </a:r>
-            <a:endParaRPr lang="en-US" altLang="id-ID" sz="2400">
-              <a:solidFill>
-                <a:srgbClr val="303870"/>
-              </a:solidFill>
-              <a:latin typeface="Inter" panose="02000503000000020004"/>
-            </a:endParaRPr>
-          </a:p>
-        </p:txBody>
-      </p:sp>
+              <a:t>Timeline</a:t>
+            </a:r>
+            <a:endParaRPr lang="id-ID" sz="4000" b="1">
+              <a:solidFill>
+                <a:srgbClr val="000000"/>
+              </a:solidFill>
+              <a:latin typeface="Inter Bold" panose="02000503000000020004"/>
+            </a:endParaRPr>
+          </a:p>
+        </p:txBody>
+      </p:sp>
+      <p:pic>
+        <p:nvPicPr>
+          <p:cNvPr id="4" name="Picture 3" descr="Generated image 1"/>
+          <p:cNvPicPr>
+            <a:picLocks noChangeAspect="1"/>
+          </p:cNvPicPr>
+          <p:nvPr/>
+        </p:nvPicPr>
+        <p:blipFill>
+          <a:blip r:embed="rId1"/>
+          <a:stretch>
+            <a:fillRect/>
+          </a:stretch>
+        </p:blipFill>
+        <p:spPr>
+          <a:xfrm>
+            <a:off x="1981200" y="1638300"/>
+            <a:ext cx="13651230" cy="7503160"/>
+          </a:xfrm>
+          <a:prstGeom prst="rect">
+            <a:avLst/>
+          </a:prstGeom>
+        </p:spPr>
+      </p:pic>
     </p:spTree>
   </p:cSld>
   <p:clrMapOvr>

--- a/documents/proposal/presentation.pptx
+++ b/documents/proposal/presentation.pptx
@@ -10,11 +10,11 @@
     <p:sldId id="258" r:id="rId5"/>
     <p:sldId id="259" r:id="rId6"/>
     <p:sldId id="260" r:id="rId7"/>
-    <p:sldId id="263" r:id="rId8"/>
-    <p:sldId id="261" r:id="rId9"/>
-    <p:sldId id="268" r:id="rId10"/>
-    <p:sldId id="264" r:id="rId11"/>
-    <p:sldId id="266" r:id="rId12"/>
+    <p:sldId id="261" r:id="rId8"/>
+    <p:sldId id="268" r:id="rId9"/>
+    <p:sldId id="264" r:id="rId10"/>
+    <p:sldId id="266" r:id="rId11"/>
+    <p:sldId id="263" r:id="rId12"/>
   </p:sldIdLst>
   <p:sldSz cx="18288000" cy="10287000"/>
   <p:notesSz cx="6858000" cy="9144000"/>
@@ -3494,8 +3494,8 @@
         </p:nvSpPr>
         <p:spPr>
           <a:xfrm>
-            <a:off x="7620000" y="4543425"/>
-            <a:ext cx="3032125" cy="1200150"/>
+            <a:off x="457200" y="1200000"/>
+            <a:ext cx="17373600" cy="1200000"/>
           </a:xfrm>
           <a:prstGeom prst="rect">
             <a:avLst/>
@@ -3511,19 +3511,111 @@
               </a:lnSpc>
             </a:pPr>
             <a:r>
-              <a:rPr lang="en-US" altLang="id-ID" sz="4200" b="1">
+              <a:rPr lang="en-US" altLang="en-GB" sz="4200" b="1">
                 <a:solidFill>
                   <a:srgbClr val="000000"/>
                 </a:solidFill>
-                <a:latin typeface="Inter Bold" panose="02000503000000020004"/>
-              </a:rPr>
-              <a:t>Thank You</a:t>
-            </a:r>
-            <a:endParaRPr lang="en-US" altLang="id-ID" sz="2400">
+                <a:latin typeface="+mj-lt"/>
+                <a:cs typeface="+mj-lt"/>
+              </a:rPr>
+              <a:t>researcher's own previous work</a:t>
+            </a:r>
+            <a:endParaRPr lang="id-ID" sz="2400">
               <a:solidFill>
                 <a:srgbClr val="303870"/>
               </a:solidFill>
-              <a:latin typeface="Inter" panose="02000503000000020004"/>
+              <a:latin typeface="+mj-lt"/>
+              <a:cs typeface="+mj-lt"/>
+            </a:endParaRPr>
+          </a:p>
+        </p:txBody>
+      </p:sp>
+      <p:pic>
+        <p:nvPicPr>
+          <p:cNvPr id="3" name="Picture 2"/>
+          <p:cNvPicPr>
+            <a:picLocks noChangeAspect="1"/>
+          </p:cNvPicPr>
+          <p:nvPr/>
+        </p:nvPicPr>
+        <p:blipFill>
+          <a:blip r:embed="rId1"/>
+          <a:stretch>
+            <a:fillRect/>
+          </a:stretch>
+        </p:blipFill>
+        <p:spPr>
+          <a:xfrm>
+            <a:off x="533400" y="2781300"/>
+            <a:ext cx="7839075" cy="5257800"/>
+          </a:xfrm>
+          <a:prstGeom prst="rect">
+            <a:avLst/>
+          </a:prstGeom>
+        </p:spPr>
+      </p:pic>
+      <p:pic>
+        <p:nvPicPr>
+          <p:cNvPr id="9" name="Picture 8"/>
+          <p:cNvPicPr>
+            <a:picLocks noChangeAspect="1"/>
+          </p:cNvPicPr>
+          <p:nvPr/>
+        </p:nvPicPr>
+        <p:blipFill>
+          <a:blip r:embed="rId2"/>
+          <a:stretch>
+            <a:fillRect/>
+          </a:stretch>
+        </p:blipFill>
+        <p:spPr>
+          <a:xfrm>
+            <a:off x="8610600" y="2781300"/>
+            <a:ext cx="7696200" cy="3838575"/>
+          </a:xfrm>
+          <a:prstGeom prst="rect">
+            <a:avLst/>
+          </a:prstGeom>
+        </p:spPr>
+      </p:pic>
+      <p:sp>
+        <p:nvSpPr>
+          <p:cNvPr id="10" name="Title"/>
+          <p:cNvSpPr txBox="1"/>
+          <p:nvPr/>
+        </p:nvSpPr>
+        <p:spPr>
+          <a:xfrm>
+            <a:off x="8686800" y="6819900"/>
+            <a:ext cx="7616190" cy="1200150"/>
+          </a:xfrm>
+          <a:prstGeom prst="rect">
+            <a:avLst/>
+          </a:prstGeom>
+        </p:spPr>
+        <p:txBody>
+          <a:bodyPr lIns="0" tIns="0" rIns="0" bIns="0" rtlCol="0" anchor="ctr"/>
+          <a:lstStyle/>
+          <a:p>
+            <a:pPr algn="l">
+              <a:lnSpc>
+                <a:spcPts val="4790"/>
+              </a:lnSpc>
+            </a:pPr>
+            <a:r>
+              <a:rPr lang="en-US" altLang="en-GB" sz="2400">
+                <a:solidFill>
+                  <a:srgbClr val="303870"/>
+                </a:solidFill>
+                <a:cs typeface="+mn-lt"/>
+              </a:rPr>
+              <a:t>https://github.com/wahyudesu/malware-detection</a:t>
+            </a:r>
+            <a:endParaRPr lang="en-US" altLang="en-GB" sz="2400">
+              <a:solidFill>
+                <a:srgbClr val="303870"/>
+              </a:solidFill>
+              <a:cs typeface="+mn-lt"/>
             </a:endParaRPr>
           </a:p>
         </p:txBody>
@@ -6810,16 +6902,16 @@
               </a:lnSpc>
             </a:pPr>
             <a:r>
-              <a:rPr lang="en-US" altLang="en-GB" sz="4200" b="1">
+              <a:rPr lang="en-US" altLang="id-ID" sz="4200" b="1">
                 <a:solidFill>
                   <a:srgbClr val="000000"/>
                 </a:solidFill>
                 <a:latin typeface="+mj-lt"/>
                 <a:cs typeface="+mj-lt"/>
               </a:rPr>
-              <a:t>researcher's own previous work</a:t>
-            </a:r>
-            <a:endParaRPr lang="id-ID" sz="2400">
+              <a:t>Diagram system</a:t>
+            </a:r>
+            <a:endParaRPr lang="en-US" altLang="id-ID" sz="2400">
               <a:solidFill>
                 <a:srgbClr val="303870"/>
               </a:solidFill>
@@ -6845,80 +6937,14 @@
         </p:blipFill>
         <p:spPr>
           <a:xfrm>
-            <a:off x="533400" y="2781300"/>
-            <a:ext cx="7839075" cy="5257800"/>
+            <a:off x="7086600" y="-38100"/>
+            <a:ext cx="9290050" cy="10888980"/>
           </a:xfrm>
           <a:prstGeom prst="rect">
             <a:avLst/>
           </a:prstGeom>
         </p:spPr>
       </p:pic>
-      <p:pic>
-        <p:nvPicPr>
-          <p:cNvPr id="9" name="Picture 8"/>
-          <p:cNvPicPr>
-            <a:picLocks noChangeAspect="1"/>
-          </p:cNvPicPr>
-          <p:nvPr/>
-        </p:nvPicPr>
-        <p:blipFill>
-          <a:blip r:embed="rId2"/>
-          <a:stretch>
-            <a:fillRect/>
-          </a:stretch>
-        </p:blipFill>
-        <p:spPr>
-          <a:xfrm>
-            <a:off x="8610600" y="2781300"/>
-            <a:ext cx="7696200" cy="3838575"/>
-          </a:xfrm>
-          <a:prstGeom prst="rect">
-            <a:avLst/>
-          </a:prstGeom>
-        </p:spPr>
-      </p:pic>
-      <p:sp>
-        <p:nvSpPr>
-          <p:cNvPr id="10" name="Title"/>
-          <p:cNvSpPr txBox="1"/>
-          <p:nvPr/>
-        </p:nvSpPr>
-        <p:spPr>
-          <a:xfrm>
-            <a:off x="8686800" y="6819900"/>
-            <a:ext cx="7616190" cy="1200150"/>
-          </a:xfrm>
-          <a:prstGeom prst="rect">
-            <a:avLst/>
-          </a:prstGeom>
-        </p:spPr>
-        <p:txBody>
-          <a:bodyPr lIns="0" tIns="0" rIns="0" bIns="0" rtlCol="0" anchor="ctr"/>
-          <a:lstStyle/>
-          <a:p>
-            <a:pPr algn="l">
-              <a:lnSpc>
-                <a:spcPts val="4790"/>
-              </a:lnSpc>
-            </a:pPr>
-            <a:r>
-              <a:rPr lang="en-US" altLang="en-GB" sz="2400">
-                <a:solidFill>
-                  <a:srgbClr val="303870"/>
-                </a:solidFill>
-                <a:cs typeface="+mn-lt"/>
-              </a:rPr>
-              <a:t>https://github.com/wahyudesu/malware-detection</a:t>
-            </a:r>
-            <a:endParaRPr lang="en-US" altLang="en-GB" sz="2400">
-              <a:solidFill>
-                <a:srgbClr val="303870"/>
-              </a:solidFill>
-              <a:cs typeface="+mn-lt"/>
-            </a:endParaRPr>
-          </a:p>
-        </p:txBody>
-      </p:sp>
     </p:spTree>
   </p:cSld>
   <p:clrMapOvr>
@@ -6984,7 +7010,7 @@
                 <a:latin typeface="+mj-lt"/>
                 <a:cs typeface="+mj-lt"/>
               </a:rPr>
-              <a:t>Diagram system</a:t>
+              <a:t>In progressing</a:t>
             </a:r>
             <a:endParaRPr lang="en-US" altLang="id-ID" sz="2400">
               <a:solidFill>
@@ -6996,30 +7022,6 @@
           </a:p>
         </p:txBody>
       </p:sp>
-      <p:pic>
-        <p:nvPicPr>
-          <p:cNvPr id="4" name="Picture 3" descr="image"/>
-          <p:cNvPicPr>
-            <a:picLocks noChangeAspect="1"/>
-          </p:cNvPicPr>
-          <p:nvPr/>
-        </p:nvPicPr>
-        <p:blipFill>
-          <a:blip r:embed="rId1"/>
-          <a:stretch>
-            <a:fillRect/>
-          </a:stretch>
-        </p:blipFill>
-        <p:spPr>
-          <a:xfrm>
-            <a:off x="6705600" y="1028700"/>
-            <a:ext cx="9488805" cy="8517255"/>
-          </a:xfrm>
-          <a:prstGeom prst="rect">
-            <a:avLst/>
-          </a:prstGeom>
-        </p:spPr>
-      </p:pic>
     </p:spTree>
   </p:cSld>
   <p:clrMapOvr>
@@ -7061,42 +7063,64 @@
         </p:nvSpPr>
         <p:spPr>
           <a:xfrm>
-            <a:off x="457200" y="1200000"/>
-            <a:ext cx="17373600" cy="1200000"/>
+            <a:off x="457200" y="420000"/>
+            <a:ext cx="17373600" cy="700000"/>
           </a:xfrm>
           <a:prstGeom prst="rect">
             <a:avLst/>
           </a:prstGeom>
         </p:spPr>
         <p:txBody>
-          <a:bodyPr lIns="0" tIns="0" rIns="0" bIns="0" rtlCol="0" anchor="ctr"/>
+          <a:bodyPr wrap="square" lIns="0" tIns="0" rIns="0" bIns="0" rtlCol="0" anchor="t"/>
           <a:lstStyle/>
           <a:p>
             <a:pPr algn="l">
               <a:lnSpc>
-                <a:spcPts val="4790"/>
-              </a:lnSpc>
-            </a:pPr>
-            <a:r>
-              <a:rPr lang="en-US" altLang="id-ID" sz="4200" b="1">
+                <a:spcPts val="4500"/>
+              </a:lnSpc>
+            </a:pPr>
+            <a:r>
+              <a:rPr lang="id-ID" sz="4000" b="1">
                 <a:solidFill>
                   <a:srgbClr val="000000"/>
                 </a:solidFill>
-                <a:latin typeface="+mj-lt"/>
-                <a:cs typeface="+mj-lt"/>
-              </a:rPr>
-              <a:t>In progressing</a:t>
-            </a:r>
-            <a:endParaRPr lang="en-US" altLang="id-ID" sz="2400">
-              <a:solidFill>
-                <a:srgbClr val="303870"/>
-              </a:solidFill>
-              <a:latin typeface="+mj-lt"/>
-              <a:cs typeface="+mj-lt"/>
-            </a:endParaRPr>
-          </a:p>
-        </p:txBody>
-      </p:sp>
+                <a:latin typeface="Inter Bold" panose="02000503000000020004"/>
+              </a:rPr>
+              <a:t>Timeline</a:t>
+            </a:r>
+            <a:endParaRPr lang="id-ID" sz="4000" b="1">
+              <a:solidFill>
+                <a:srgbClr val="000000"/>
+              </a:solidFill>
+              <a:latin typeface="Inter Bold" panose="02000503000000020004"/>
+            </a:endParaRPr>
+          </a:p>
+        </p:txBody>
+      </p:sp>
+      <p:pic>
+        <p:nvPicPr>
+          <p:cNvPr id="4" name="Picture 3" descr="Generated image 1"/>
+          <p:cNvPicPr>
+            <a:picLocks noChangeAspect="1"/>
+          </p:cNvPicPr>
+          <p:nvPr/>
+        </p:nvPicPr>
+        <p:blipFill>
+          <a:blip r:embed="rId1"/>
+          <a:stretch>
+            <a:fillRect/>
+          </a:stretch>
+        </p:blipFill>
+        <p:spPr>
+          <a:xfrm>
+            <a:off x="1981200" y="1638300"/>
+            <a:ext cx="13651230" cy="7503160"/>
+          </a:xfrm>
+          <a:prstGeom prst="rect">
+            <a:avLst/>
+          </a:prstGeom>
+        </p:spPr>
+      </p:pic>
     </p:spTree>
   </p:cSld>
   <p:clrMapOvr>
@@ -7138,64 +7162,65 @@
         </p:nvSpPr>
         <p:spPr>
           <a:xfrm>
-            <a:off x="457200" y="420000"/>
-            <a:ext cx="17373600" cy="700000"/>
+            <a:off x="7620000" y="4543425"/>
+            <a:ext cx="3032125" cy="1200150"/>
           </a:xfrm>
           <a:prstGeom prst="rect">
             <a:avLst/>
           </a:prstGeom>
         </p:spPr>
         <p:txBody>
-          <a:bodyPr wrap="square" lIns="0" tIns="0" rIns="0" bIns="0" rtlCol="0" anchor="t"/>
+          <a:bodyPr lIns="0" tIns="0" rIns="0" bIns="0" rtlCol="0" anchor="ctr"/>
           <a:lstStyle/>
           <a:p>
             <a:pPr algn="l">
               <a:lnSpc>
-                <a:spcPts val="4500"/>
-              </a:lnSpc>
-            </a:pPr>
-            <a:r>
-              <a:rPr lang="id-ID" sz="4000" b="1">
+                <a:spcPts val="4790"/>
+              </a:lnSpc>
+            </a:pPr>
+            <a:r>
+              <a:rPr lang="en-US" altLang="id-ID" sz="4200" b="1">
                 <a:solidFill>
                   <a:srgbClr val="000000"/>
                 </a:solidFill>
                 <a:latin typeface="Inter Bold" panose="02000503000000020004"/>
               </a:rPr>
-              <a:t>Timeline</a:t>
-            </a:r>
-            <a:endParaRPr lang="id-ID" sz="4000" b="1">
-              <a:solidFill>
-                <a:srgbClr val="000000"/>
-              </a:solidFill>
-              <a:latin typeface="Inter Bold" panose="02000503000000020004"/>
-            </a:endParaRPr>
-          </a:p>
-        </p:txBody>
-      </p:sp>
-      <p:pic>
-        <p:nvPicPr>
-          <p:cNvPr id="4" name="Picture 3" descr="Generated image 1"/>
-          <p:cNvPicPr>
-            <a:picLocks noChangeAspect="1"/>
-          </p:cNvPicPr>
+              <a:t>Thank You</a:t>
+            </a:r>
+            <a:endParaRPr lang="en-US" altLang="id-ID" sz="2400">
+              <a:solidFill>
+                <a:srgbClr val="303870"/>
+              </a:solidFill>
+              <a:latin typeface="Inter" panose="02000503000000020004"/>
+            </a:endParaRPr>
+          </a:p>
+        </p:txBody>
+      </p:sp>
+      <p:sp>
+        <p:nvSpPr>
+          <p:cNvPr id="3" name="Text Box 2"/>
+          <p:cNvSpPr txBox="1"/>
           <p:nvPr/>
-        </p:nvPicPr>
-        <p:blipFill>
-          <a:blip r:embed="rId1"/>
-          <a:stretch>
-            <a:fillRect/>
-          </a:stretch>
-        </p:blipFill>
-        <p:spPr>
-          <a:xfrm>
-            <a:off x="1981200" y="1638300"/>
-            <a:ext cx="13651230" cy="7503160"/>
+        </p:nvSpPr>
+        <p:spPr>
+          <a:xfrm>
+            <a:off x="15942310" y="-546100"/>
+            <a:ext cx="6096000" cy="368300"/>
           </a:xfrm>
           <a:prstGeom prst="rect">
             <a:avLst/>
           </a:prstGeom>
-        </p:spPr>
-      </p:pic>
+          <a:noFill/>
+        </p:spPr>
+        <p:txBody>
+          <a:bodyPr wrap="square" rtlCol="0">
+            <a:spAutoFit/>
+          </a:bodyPr>
+          <a:p>
+            <a:endParaRPr lang="en-GB" altLang="en-US"/>
+          </a:p>
+        </p:txBody>
+      </p:sp>
     </p:spTree>
   </p:cSld>
   <p:clrMapOvr>
